--- a/videos/deep-learning/002_transformers_part2/recreated_pptx/slide_008_recreated.pptx
+++ b/videos/deep-learning/002_transformers_part2/recreated_pptx/slide_008_recreated.pptx
@@ -7435,6 +7435,125 @@
         </p:nvSpPr>
         <p:spPr>
           <a:xfrm>
+            <a:off x="6788150" y="2914650"/>
+            <a:ext cx="1123950" cy="0"/>
+          </a:xfrm>
+          <a:prstGeom prst="line">
+            <a:avLst/>
+          </a:prstGeom>
+          <a:noFill/>
+          <a:ln w="9525">
+            <a:solidFill>
+              <a:srgbClr val="C03030"/>
+            </a:solidFill>
+            <a:prstDash val="solid"/>
+          </a:ln>
+        </p:spPr>
+      </p:sp>
+      <p:sp>
+        <p:nvSpPr>
+          <p:cNvPr id="217" name="Shape 215"/>
+          <p:cNvSpPr/>
+          <p:nvPr/>
+        </p:nvSpPr>
+        <p:spPr>
+          <a:xfrm flipV="1">
+            <a:off x="6788150" y="2794000"/>
+            <a:ext cx="0" cy="254000"/>
+          </a:xfrm>
+          <a:prstGeom prst="line">
+            <a:avLst/>
+          </a:prstGeom>
+          <a:noFill/>
+          <a:ln w="19050">
+            <a:solidFill>
+              <a:srgbClr val="C03030"/>
+            </a:solidFill>
+            <a:prstDash val="solid"/>
+            <a:tailEnd type="triangle"/>
+          </a:ln>
+        </p:spPr>
+      </p:sp>
+      <p:sp>
+        <p:nvSpPr>
+          <p:cNvPr id="218" name="Shape 216"/>
+          <p:cNvSpPr/>
+          <p:nvPr/>
+        </p:nvSpPr>
+        <p:spPr>
+          <a:xfrm flipV="1">
+            <a:off x="7169150" y="2794000"/>
+            <a:ext cx="0" cy="895350"/>
+          </a:xfrm>
+          <a:prstGeom prst="line">
+            <a:avLst/>
+          </a:prstGeom>
+          <a:noFill/>
+          <a:ln w="19050">
+            <a:solidFill>
+              <a:srgbClr val="C03030"/>
+            </a:solidFill>
+            <a:prstDash val="solid"/>
+            <a:tailEnd type="triangle"/>
+          </a:ln>
+        </p:spPr>
+      </p:sp>
+      <p:sp>
+        <p:nvSpPr>
+          <p:cNvPr id="219" name="Shape 217"/>
+          <p:cNvSpPr/>
+          <p:nvPr/>
+        </p:nvSpPr>
+        <p:spPr>
+          <a:xfrm flipV="1">
+            <a:off x="7524750" y="2794000"/>
+            <a:ext cx="0" cy="1339850"/>
+          </a:xfrm>
+          <a:prstGeom prst="line">
+            <a:avLst/>
+          </a:prstGeom>
+          <a:noFill/>
+          <a:ln w="19050">
+            <a:solidFill>
+              <a:srgbClr val="C03030"/>
+            </a:solidFill>
+            <a:prstDash val="solid"/>
+            <a:tailEnd type="triangle"/>
+          </a:ln>
+        </p:spPr>
+      </p:sp>
+      <p:sp>
+        <p:nvSpPr>
+          <p:cNvPr id="220" name="Shape 218"/>
+          <p:cNvSpPr/>
+          <p:nvPr/>
+        </p:nvSpPr>
+        <p:spPr>
+          <a:xfrm flipV="1">
+            <a:off x="7912100" y="2794000"/>
+            <a:ext cx="0" cy="1924050"/>
+          </a:xfrm>
+          <a:prstGeom prst="line">
+            <a:avLst/>
+          </a:prstGeom>
+          <a:noFill/>
+          <a:ln w="19050">
+            <a:solidFill>
+              <a:srgbClr val="C03030"/>
+            </a:solidFill>
+            <a:prstDash val="solid"/>
+            <a:tailEnd type="triangle"/>
+          </a:ln>
+        </p:spPr>
+      </p:sp>
+      <p:sp>
+        <p:nvSpPr>
+          <p:cNvPr id="221" name="Shape 219"/>
+          <p:cNvSpPr/>
+          <p:nvPr/>
+        </p:nvSpPr>
+        <p:spPr>
+          <a:xfrm>
             <a:off x="3492500" y="5486400"/>
             <a:ext cx="596900" cy="609600"/>
           </a:xfrm>
@@ -7454,7 +7573,7 @@
       </p:sp>
       <p:sp>
         <p:nvSpPr>
-          <p:cNvPr id="217" name="Text 215"/>
+          <p:cNvPr id="222" name="Text 220"/>
           <p:cNvSpPr/>
           <p:nvPr/>
         </p:nvSpPr>
@@ -7521,7 +7640,7 @@
       </p:sp>
       <p:sp>
         <p:nvSpPr>
-          <p:cNvPr id="218" name="Text 216"/>
+          <p:cNvPr id="223" name="Text 221"/>
           <p:cNvSpPr/>
           <p:nvPr/>
         </p:nvSpPr>
@@ -7574,7 +7693,7 @@
       </p:sp>
       <p:sp>
         <p:nvSpPr>
-          <p:cNvPr id="219" name="Shape 217"/>
+          <p:cNvPr id="224" name="Shape 222"/>
           <p:cNvSpPr/>
           <p:nvPr/>
         </p:nvSpPr>
@@ -7599,7 +7718,7 @@
       </p:sp>
       <p:sp>
         <p:nvSpPr>
-          <p:cNvPr id="220" name="Shape 218"/>
+          <p:cNvPr id="225" name="Shape 223"/>
           <p:cNvSpPr/>
           <p:nvPr/>
         </p:nvSpPr>
@@ -7624,7 +7743,7 @@
       </p:sp>
       <p:sp>
         <p:nvSpPr>
-          <p:cNvPr id="221" name="Shape 219"/>
+          <p:cNvPr id="226" name="Shape 224"/>
           <p:cNvSpPr/>
           <p:nvPr/>
         </p:nvSpPr>
@@ -7649,7 +7768,7 @@
       </p:sp>
       <p:sp>
         <p:nvSpPr>
-          <p:cNvPr id="222" name="Shape 220"/>
+          <p:cNvPr id="227" name="Shape 225"/>
           <p:cNvSpPr/>
           <p:nvPr/>
         </p:nvSpPr>
@@ -7674,7 +7793,7 @@
       </p:sp>
       <p:sp>
         <p:nvSpPr>
-          <p:cNvPr id="223" name="Shape 221"/>
+          <p:cNvPr id="228" name="Shape 226"/>
           <p:cNvSpPr/>
           <p:nvPr/>
         </p:nvSpPr>
@@ -7699,7 +7818,7 @@
       </p:sp>
       <p:sp>
         <p:nvSpPr>
-          <p:cNvPr id="224" name="Shape 222"/>
+          <p:cNvPr id="229" name="Shape 227"/>
           <p:cNvSpPr/>
           <p:nvPr/>
         </p:nvSpPr>
@@ -7723,7 +7842,7 @@
       </p:sp>
       <p:sp>
         <p:nvSpPr>
-          <p:cNvPr id="225" name="Shape 223"/>
+          <p:cNvPr id="230" name="Shape 228"/>
           <p:cNvSpPr/>
           <p:nvPr/>
         </p:nvSpPr>
@@ -7747,7 +7866,7 @@
       </p:sp>
       <p:sp>
         <p:nvSpPr>
-          <p:cNvPr id="226" name="Shape 224"/>
+          <p:cNvPr id="231" name="Shape 229"/>
           <p:cNvSpPr/>
           <p:nvPr/>
         </p:nvSpPr>
@@ -7772,7 +7891,7 @@
       </p:sp>
       <p:sp>
         <p:nvSpPr>
-          <p:cNvPr id="227" name="Shape 225"/>
+          <p:cNvPr id="232" name="Shape 230"/>
           <p:cNvSpPr/>
           <p:nvPr/>
         </p:nvSpPr>
@@ -7797,7 +7916,7 @@
       </p:sp>
       <p:sp>
         <p:nvSpPr>
-          <p:cNvPr id="228" name="Shape 226"/>
+          <p:cNvPr id="233" name="Shape 231"/>
           <p:cNvSpPr/>
           <p:nvPr/>
         </p:nvSpPr>
@@ -7822,7 +7941,7 @@
       </p:sp>
       <p:sp>
         <p:nvSpPr>
-          <p:cNvPr id="229" name="Shape 227"/>
+          <p:cNvPr id="234" name="Shape 232"/>
           <p:cNvSpPr/>
           <p:nvPr/>
         </p:nvSpPr>
@@ -7847,7 +7966,7 @@
       </p:sp>
       <p:sp>
         <p:nvSpPr>
-          <p:cNvPr id="230" name="Shape 228"/>
+          <p:cNvPr id="235" name="Shape 233"/>
           <p:cNvSpPr/>
           <p:nvPr/>
         </p:nvSpPr>
@@ -7872,7 +7991,7 @@
       </p:sp>
       <p:sp>
         <p:nvSpPr>
-          <p:cNvPr id="231" name="Shape 229"/>
+          <p:cNvPr id="236" name="Shape 234"/>
           <p:cNvSpPr/>
           <p:nvPr/>
         </p:nvSpPr>
@@ -7894,7 +8013,7 @@
       </p:sp>
       <p:sp>
         <p:nvSpPr>
-          <p:cNvPr id="232" name="Text 230"/>
+          <p:cNvPr id="237" name="Text 235"/>
           <p:cNvSpPr/>
           <p:nvPr/>
         </p:nvSpPr>
@@ -7933,7 +8052,7 @@
       </p:sp>
       <p:sp>
         <p:nvSpPr>
-          <p:cNvPr id="233" name="Shape 231"/>
+          <p:cNvPr id="238" name="Shape 236"/>
           <p:cNvSpPr/>
           <p:nvPr/>
         </p:nvSpPr>
@@ -7958,7 +8077,7 @@
       </p:sp>
       <p:sp>
         <p:nvSpPr>
-          <p:cNvPr id="234" name="Shape 232"/>
+          <p:cNvPr id="239" name="Shape 237"/>
           <p:cNvSpPr/>
           <p:nvPr/>
         </p:nvSpPr>
@@ -7978,7 +8097,7 @@
       </p:sp>
       <p:sp>
         <p:nvSpPr>
-          <p:cNvPr id="235" name="Shape 233"/>
+          <p:cNvPr id="240" name="Shape 238"/>
           <p:cNvSpPr/>
           <p:nvPr/>
         </p:nvSpPr>
@@ -8001,7 +8120,7 @@
       </p:sp>
       <p:sp>
         <p:nvSpPr>
-          <p:cNvPr id="236" name="Shape 234"/>
+          <p:cNvPr id="241" name="Shape 239"/>
           <p:cNvSpPr/>
           <p:nvPr/>
         </p:nvSpPr>
@@ -8023,7 +8142,7 @@
       </p:sp>
       <p:sp>
         <p:nvSpPr>
-          <p:cNvPr id="237" name="Shape 235"/>
+          <p:cNvPr id="242" name="Shape 240"/>
           <p:cNvSpPr/>
           <p:nvPr/>
         </p:nvSpPr>
@@ -8043,7 +8162,7 @@
       </p:sp>
       <p:sp>
         <p:nvSpPr>
-          <p:cNvPr id="238" name="Text 236"/>
+          <p:cNvPr id="243" name="Text 241"/>
           <p:cNvSpPr/>
           <p:nvPr/>
         </p:nvSpPr>
@@ -8096,7 +8215,7 @@
       </p:sp>
       <p:sp>
         <p:nvSpPr>
-          <p:cNvPr id="239" name="Text 237"/>
+          <p:cNvPr id="244" name="Text 242"/>
           <p:cNvSpPr/>
           <p:nvPr/>
         </p:nvSpPr>
@@ -8345,7 +8464,7 @@
       </p:sp>
       <p:sp>
         <p:nvSpPr>
-          <p:cNvPr id="240" name="Shape 238"/>
+          <p:cNvPr id="245" name="Shape 243"/>
           <p:cNvSpPr/>
           <p:nvPr/>
         </p:nvSpPr>
@@ -8370,7 +8489,7 @@
       </p:sp>
       <p:sp>
         <p:nvSpPr>
-          <p:cNvPr id="241" name="Text 239"/>
+          <p:cNvPr id="246" name="Text 244"/>
           <p:cNvSpPr/>
           <p:nvPr/>
         </p:nvSpPr>
